--- a/catalog/samples/dot_matrix_share.pptx
+++ b/catalog/samples/dot_matrix_share.pptx
@@ -1152,7 +1152,7 @@
           </a:p>
           <a:p>
             <a:r>
-              <a:t>  "template_sha256": "456f9b139f5e5530761e3ef8d6a9b5304e43a637421a8a6df93313f8c6bd5b58"</a:t>
+              <a:t>  "template_sha256": "328493812d4cf842b973c643a3a96442cf83c95ee445831df15380c9fb4f1186"</a:t>
             </a:r>
           </a:p>
           <a:p>
